--- a/Success Plan - Foundry Analytics.pptx
+++ b/Success Plan - Foundry Analytics.pptx
@@ -2878,7 +2878,7 @@
                 <a:ea typeface="Calibri" pitchFamily="34" charset="-122"/>
                 <a:cs typeface="Calibri" pitchFamily="34" charset="-120"/>
               </a:rPr>
-              <a:t>ADOPTION</a:t>
+              <a:t>PROCESS SIMPLIFIED</a:t>
             </a:r>
             <a:endParaRPr lang="en-US" sz="1050" dirty="0"/>
           </a:p>
@@ -2917,7 +2917,7 @@
                 <a:ea typeface="Cambria" pitchFamily="34" charset="-122"/>
                 <a:cs typeface="Cambria" pitchFamily="34" charset="-120"/>
               </a:rPr>
-              <a:t>340 / 500</a:t>
+              <a:t>61 / 75</a:t>
             </a:r>
             <a:endParaRPr lang="en-US" sz="2600" dirty="0"/>
           </a:p>
@@ -2956,7 +2956,7 @@
                 <a:ea typeface="Calibri" pitchFamily="34" charset="-122"/>
                 <a:cs typeface="Calibri" pitchFamily="34" charset="-120"/>
               </a:rPr>
-              <a:t>Monthly active dashboard users (users)</a:t>
+              <a:t>Self-serve report requests deflected (%)</a:t>
             </a:r>
             <a:endParaRPr lang="en-US" sz="1050" dirty="0"/>
           </a:p>
@@ -3022,7 +3022,7 @@
                 <a:ea typeface="Calibri" pitchFamily="34" charset="-122"/>
                 <a:cs typeface="Calibri" pitchFamily="34" charset="-120"/>
               </a:rPr>
-              <a:t>ONBOARDING</a:t>
+              <a:t>TIME SAVED</a:t>
             </a:r>
             <a:endParaRPr lang="en-US" sz="1050" dirty="0"/>
           </a:p>
@@ -3061,7 +3061,7 @@
                 <a:ea typeface="Cambria" pitchFamily="34" charset="-122"/>
                 <a:cs typeface="Cambria" pitchFamily="34" charset="-120"/>
               </a:rPr>
-              <a:t>21 / 21</a:t>
+              <a:t>180 / 400</a:t>
             </a:r>
             <a:endParaRPr lang="en-US" sz="2600" dirty="0"/>
           </a:p>
@@ -3100,7 +3100,7 @@
                 <a:ea typeface="Calibri" pitchFamily="34" charset="-122"/>
                 <a:cs typeface="Calibri" pitchFamily="34" charset="-120"/>
               </a:rPr>
-              <a:t>Time-to-first-value (days)</a:t>
+              <a:t>Analyst hours saved (hours/month)</a:t>
             </a:r>
             <a:endParaRPr lang="en-US" sz="1050" dirty="0"/>
           </a:p>
@@ -3166,7 +3166,7 @@
                 <a:ea typeface="Calibri" pitchFamily="34" charset="-122"/>
                 <a:cs typeface="Calibri" pitchFamily="34" charset="-120"/>
               </a:rPr>
-              <a:t>BUSINESS IMPACT</a:t>
+              <a:t>COST REDUCTION</a:t>
             </a:r>
             <a:endParaRPr lang="en-US" sz="1050" dirty="0"/>
           </a:p>
@@ -3205,7 +3205,7 @@
                 <a:ea typeface="Cambria" pitchFamily="34" charset="-122"/>
                 <a:cs typeface="Cambria" pitchFamily="34" charset="-120"/>
               </a:rPr>
-              <a:t>61 / 75</a:t>
+              <a:t>$50,000 / $200,000</a:t>
             </a:r>
             <a:endParaRPr lang="en-US" sz="2600" dirty="0"/>
           </a:p>
@@ -3244,7 +3244,7 @@
                 <a:ea typeface="Calibri" pitchFamily="34" charset="-122"/>
                 <a:cs typeface="Calibri" pitchFamily="34" charset="-120"/>
               </a:rPr>
-              <a:t>Self-serve report requests deflected (%)</a:t>
+              <a:t>Legacy BI licensing costs avoided (per year)</a:t>
             </a:r>
             <a:endParaRPr lang="en-US" sz="1050" dirty="0"/>
           </a:p>
@@ -3393,7 +3393,7 @@
                 <a:ea typeface="Calibri" pitchFamily="34" charset="-122"/>
                 <a:cs typeface="Calibri" pitchFamily="34" charset="-120"/>
               </a:rPr>
-              <a:t>TSIA COMPONENT 1</a:t>
+              <a:t>SECTION 1</a:t>
             </a:r>
             <a:endParaRPr lang="en-US" sz="1200" dirty="0"/>
           </a:p>
@@ -4200,7 +4200,7 @@
                 <a:ea typeface="Calibri" pitchFamily="34" charset="-122"/>
                 <a:cs typeface="Calibri" pitchFamily="34" charset="-120"/>
               </a:rPr>
-              <a:t>TSIA COMPONENT 2</a:t>
+              <a:t>SECTION 2</a:t>
             </a:r>
             <a:endParaRPr lang="en-US" sz="1200" dirty="0"/>
           </a:p>
@@ -4502,7 +4502,7 @@
                 <a:ea typeface="Calibri" pitchFamily="34" charset="-122"/>
                 <a:cs typeface="Calibri" pitchFamily="34" charset="-120"/>
               </a:rPr>
-              <a:t>TSIA COMPONENT 3</a:t>
+              <a:t>SECTION 3</a:t>
             </a:r>
             <a:endParaRPr lang="en-US" sz="1200" dirty="0"/>
           </a:p>
@@ -5525,7 +5525,7 @@
                 <a:ea typeface="Calibri" pitchFamily="34" charset="-122"/>
                 <a:cs typeface="Calibri" pitchFamily="34" charset="-120"/>
               </a:rPr>
-              <a:t>TSIA COMPONENT 4</a:t>
+              <a:t>SECTION 4</a:t>
             </a:r>
             <a:endParaRPr lang="en-US" sz="1200" dirty="0"/>
           </a:p>
@@ -5579,7 +5579,7 @@
         <p:spPr>
           <a:xfrm>
             <a:off x="548640" y="1508760"/>
-            <a:ext cx="3657600" cy="2743200"/>
+            <a:ext cx="3398520" cy="2743200"/>
           </a:xfrm>
           <a:prstGeom prst="roundRect">
             <a:avLst>
@@ -5606,7 +5606,7 @@
         <p:spPr>
           <a:xfrm>
             <a:off x="822960" y="1737360"/>
-            <a:ext cx="3108960" cy="274320"/>
+            <a:ext cx="2849880" cy="274320"/>
           </a:xfrm>
           <a:prstGeom prst="rect">
             <a:avLst/>
@@ -5630,7 +5630,7 @@
                 <a:ea typeface="Calibri" pitchFamily="34" charset="-122"/>
                 <a:cs typeface="Calibri" pitchFamily="34" charset="-120"/>
               </a:rPr>
-              <a:t>ADOPTION</a:t>
+              <a:t>PROCESS SIMPLIFIED</a:t>
             </a:r>
             <a:endParaRPr lang="en-US" sz="1100" dirty="0"/>
           </a:p>
@@ -5645,7 +5645,7 @@
         <p:spPr>
           <a:xfrm>
             <a:off x="822960" y="2011680"/>
-            <a:ext cx="3108960" cy="320040"/>
+            <a:ext cx="2849880" cy="320040"/>
           </a:xfrm>
           <a:prstGeom prst="rect">
             <a:avLst/>
@@ -5669,7 +5669,7 @@
                 <a:ea typeface="Calibri" pitchFamily="34" charset="-122"/>
                 <a:cs typeface="Calibri" pitchFamily="34" charset="-120"/>
               </a:rPr>
-              <a:t>Active usage of the platform</a:t>
+              <a:t>Steps, tools, or manual work removed</a:t>
             </a:r>
             <a:endParaRPr lang="en-US" sz="1000" dirty="0"/>
           </a:p>
@@ -5684,7 +5684,7 @@
         <p:spPr>
           <a:xfrm>
             <a:off x="822960" y="2286000"/>
-            <a:ext cx="3108960" cy="365760"/>
+            <a:ext cx="2849880" cy="365760"/>
           </a:xfrm>
           <a:prstGeom prst="rect">
             <a:avLst/>
@@ -5708,7 +5708,7 @@
                 <a:ea typeface="Calibri" pitchFamily="34" charset="-122"/>
                 <a:cs typeface="Calibri" pitchFamily="34" charset="-120"/>
               </a:rPr>
-              <a:t>Monthly active dashboard users</a:t>
+              <a:t>Self-serve report requests deflected</a:t>
             </a:r>
             <a:endParaRPr lang="en-US" sz="1200" dirty="0"/>
           </a:p>
@@ -5723,7 +5723,7 @@
         <p:spPr>
           <a:xfrm>
             <a:off x="822960" y="2606040"/>
-            <a:ext cx="3108960" cy="594360"/>
+            <a:ext cx="2849880" cy="594360"/>
           </a:xfrm>
           <a:prstGeom prst="rect">
             <a:avLst/>
@@ -5747,7 +5747,7 @@
                 <a:ea typeface="Cambria" pitchFamily="34" charset="-122"/>
                 <a:cs typeface="Cambria" pitchFamily="34" charset="-120"/>
               </a:rPr>
-              <a:t>340</a:t>
+              <a:t>61</a:t>
             </a:r>
             <a:endParaRPr lang="en-US" sz="3400" dirty="0"/>
           </a:p>
@@ -5762,7 +5762,7 @@
         <p:spPr>
           <a:xfrm>
             <a:off x="822960" y="3182112"/>
-            <a:ext cx="3108960" cy="274320"/>
+            <a:ext cx="2849880" cy="274320"/>
           </a:xfrm>
           <a:prstGeom prst="rect">
             <a:avLst/>
@@ -5786,7 +5786,7 @@
                 <a:ea typeface="Calibri" pitchFamily="34" charset="-122"/>
                 <a:cs typeface="Calibri" pitchFamily="34" charset="-120"/>
               </a:rPr>
-              <a:t>of 500 users target</a:t>
+              <a:t>of 75 % target</a:t>
             </a:r>
             <a:endParaRPr lang="en-US" sz="1050" dirty="0"/>
           </a:p>
@@ -5801,7 +5801,7 @@
         <p:spPr>
           <a:xfrm>
             <a:off x="822960" y="3547872"/>
-            <a:ext cx="3108960" cy="201168"/>
+            <a:ext cx="2849880" cy="201168"/>
           </a:xfrm>
           <a:prstGeom prst="roundRect">
             <a:avLst>
@@ -5823,7 +5823,7 @@
         <p:spPr>
           <a:xfrm>
             <a:off x="822960" y="3547872"/>
-            <a:ext cx="2114093" cy="201168"/>
+            <a:ext cx="2308403" cy="201168"/>
           </a:xfrm>
           <a:prstGeom prst="roundRect">
             <a:avLst>
@@ -5845,7 +5845,7 @@
         <p:spPr>
           <a:xfrm>
             <a:off x="822960" y="3794760"/>
-            <a:ext cx="3108960" cy="274320"/>
+            <a:ext cx="2849880" cy="274320"/>
           </a:xfrm>
           <a:prstGeom prst="rect">
             <a:avLst/>
@@ -5869,7 +5869,7 @@
                 <a:ea typeface="Calibri" pitchFamily="34" charset="-122"/>
                 <a:cs typeface="Calibri" pitchFamily="34" charset="-120"/>
               </a:rPr>
-              <a:t>68% of target</a:t>
+              <a:t>81% of target</a:t>
             </a:r>
             <a:endParaRPr lang="en-US" sz="950" dirty="0"/>
           </a:p>
@@ -5883,8 +5883,8 @@
         </p:nvSpPr>
         <p:spPr>
           <a:xfrm>
-            <a:off x="4434840" y="1508760"/>
-            <a:ext cx="3657600" cy="2743200"/>
+            <a:off x="4175760" y="1508760"/>
+            <a:ext cx="3398520" cy="2743200"/>
           </a:xfrm>
           <a:prstGeom prst="roundRect">
             <a:avLst>
@@ -5910,8 +5910,8 @@
         </p:nvSpPr>
         <p:spPr>
           <a:xfrm>
-            <a:off x="4709160" y="1737360"/>
-            <a:ext cx="3108960" cy="274320"/>
+            <a:off x="4450080" y="1737360"/>
+            <a:ext cx="2849880" cy="274320"/>
           </a:xfrm>
           <a:prstGeom prst="rect">
             <a:avLst/>
@@ -5935,7 +5935,7 @@
                 <a:ea typeface="Calibri" pitchFamily="34" charset="-122"/>
                 <a:cs typeface="Calibri" pitchFamily="34" charset="-120"/>
               </a:rPr>
-              <a:t>ONBOARDING</a:t>
+              <a:t>TIME SAVED</a:t>
             </a:r>
             <a:endParaRPr lang="en-US" sz="1100" dirty="0"/>
           </a:p>
@@ -5949,8 +5949,8 @@
         </p:nvSpPr>
         <p:spPr>
           <a:xfrm>
-            <a:off x="4709160" y="2011680"/>
-            <a:ext cx="3108960" cy="320040"/>
+            <a:off x="4450080" y="2011680"/>
+            <a:ext cx="2849880" cy="320040"/>
           </a:xfrm>
           <a:prstGeom prst="rect">
             <a:avLst/>
@@ -5974,7 +5974,7 @@
                 <a:ea typeface="Calibri" pitchFamily="34" charset="-122"/>
                 <a:cs typeface="Calibri" pitchFamily="34" charset="-120"/>
               </a:rPr>
-              <a:t>Speed to first value</a:t>
+              <a:t>Hours or cycle time given back to the customer</a:t>
             </a:r>
             <a:endParaRPr lang="en-US" sz="1000" dirty="0"/>
           </a:p>
@@ -5988,8 +5988,8 @@
         </p:nvSpPr>
         <p:spPr>
           <a:xfrm>
-            <a:off x="4709160" y="2286000"/>
-            <a:ext cx="3108960" cy="365760"/>
+            <a:off x="4450080" y="2286000"/>
+            <a:ext cx="2849880" cy="365760"/>
           </a:xfrm>
           <a:prstGeom prst="rect">
             <a:avLst/>
@@ -6013,7 +6013,7 @@
                 <a:ea typeface="Calibri" pitchFamily="34" charset="-122"/>
                 <a:cs typeface="Calibri" pitchFamily="34" charset="-120"/>
               </a:rPr>
-              <a:t>Time-to-first-value</a:t>
+              <a:t>Analyst hours saved</a:t>
             </a:r>
             <a:endParaRPr lang="en-US" sz="1200" dirty="0"/>
           </a:p>
@@ -6027,8 +6027,8 @@
         </p:nvSpPr>
         <p:spPr>
           <a:xfrm>
-            <a:off x="4709160" y="2606040"/>
-            <a:ext cx="3108960" cy="594360"/>
+            <a:off x="4450080" y="2606040"/>
+            <a:ext cx="2849880" cy="594360"/>
           </a:xfrm>
           <a:prstGeom prst="rect">
             <a:avLst/>
@@ -6052,7 +6052,7 @@
                 <a:ea typeface="Cambria" pitchFamily="34" charset="-122"/>
                 <a:cs typeface="Cambria" pitchFamily="34" charset="-120"/>
               </a:rPr>
-              <a:t>21</a:t>
+              <a:t>180</a:t>
             </a:r>
             <a:endParaRPr lang="en-US" sz="3400" dirty="0"/>
           </a:p>
@@ -6066,8 +6066,8 @@
         </p:nvSpPr>
         <p:spPr>
           <a:xfrm>
-            <a:off x="4709160" y="3182112"/>
-            <a:ext cx="3108960" cy="274320"/>
+            <a:off x="4450080" y="3182112"/>
+            <a:ext cx="2849880" cy="274320"/>
           </a:xfrm>
           <a:prstGeom prst="rect">
             <a:avLst/>
@@ -6091,7 +6091,7 @@
                 <a:ea typeface="Calibri" pitchFamily="34" charset="-122"/>
                 <a:cs typeface="Calibri" pitchFamily="34" charset="-120"/>
               </a:rPr>
-              <a:t>of 21 days target</a:t>
+              <a:t>of 400 hours/month target</a:t>
             </a:r>
             <a:endParaRPr lang="en-US" sz="1050" dirty="0"/>
           </a:p>
@@ -6105,8 +6105,8 @@
         </p:nvSpPr>
         <p:spPr>
           <a:xfrm>
-            <a:off x="4709160" y="3547872"/>
-            <a:ext cx="3108960" cy="201168"/>
+            <a:off x="4450080" y="3547872"/>
+            <a:ext cx="2849880" cy="201168"/>
           </a:xfrm>
           <a:prstGeom prst="roundRect">
             <a:avLst>
@@ -6127,8 +6127,8 @@
         </p:nvSpPr>
         <p:spPr>
           <a:xfrm>
-            <a:off x="4709160" y="3547872"/>
-            <a:ext cx="3108960" cy="201168"/>
+            <a:off x="4450080" y="3547872"/>
+            <a:ext cx="1282446" cy="201168"/>
           </a:xfrm>
           <a:prstGeom prst="roundRect">
             <a:avLst>
@@ -6136,7 +6136,7 @@
             </a:avLst>
           </a:prstGeom>
           <a:solidFill>
-            <a:srgbClr val="1E8A5F"/>
+            <a:srgbClr val="B4312F"/>
           </a:solidFill>
           <a:ln/>
         </p:spPr>
@@ -6149,8 +6149,8 @@
         </p:nvSpPr>
         <p:spPr>
           <a:xfrm>
-            <a:off x="4709160" y="3794760"/>
-            <a:ext cx="3108960" cy="274320"/>
+            <a:off x="4450080" y="3794760"/>
+            <a:ext cx="2849880" cy="274320"/>
           </a:xfrm>
           <a:prstGeom prst="rect">
             <a:avLst/>
@@ -6174,7 +6174,7 @@
                 <a:ea typeface="Calibri" pitchFamily="34" charset="-122"/>
                 <a:cs typeface="Calibri" pitchFamily="34" charset="-120"/>
               </a:rPr>
-              <a:t>100% of target</a:t>
+              <a:t>45% of target</a:t>
             </a:r>
             <a:endParaRPr lang="en-US" sz="950" dirty="0"/>
           </a:p>
@@ -6188,8 +6188,8 @@
         </p:nvSpPr>
         <p:spPr>
           <a:xfrm>
-            <a:off x="8321040" y="1508760"/>
-            <a:ext cx="3657600" cy="2743200"/>
+            <a:off x="7802880" y="1508760"/>
+            <a:ext cx="3398520" cy="2743200"/>
           </a:xfrm>
           <a:prstGeom prst="roundRect">
             <a:avLst>
@@ -6215,8 +6215,8 @@
         </p:nvSpPr>
         <p:spPr>
           <a:xfrm>
-            <a:off x="8595360" y="1737360"/>
-            <a:ext cx="3108960" cy="274320"/>
+            <a:off x="8077200" y="1737360"/>
+            <a:ext cx="2849880" cy="274320"/>
           </a:xfrm>
           <a:prstGeom prst="rect">
             <a:avLst/>
@@ -6240,7 +6240,7 @@
                 <a:ea typeface="Calibri" pitchFamily="34" charset="-122"/>
                 <a:cs typeface="Calibri" pitchFamily="34" charset="-120"/>
               </a:rPr>
-              <a:t>BUSINESS IMPACT</a:t>
+              <a:t>COST REDUCTION</a:t>
             </a:r>
             <a:endParaRPr lang="en-US" sz="1100" dirty="0"/>
           </a:p>
@@ -6254,8 +6254,8 @@
         </p:nvSpPr>
         <p:spPr>
           <a:xfrm>
-            <a:off x="8595360" y="2011680"/>
-            <a:ext cx="3108960" cy="320040"/>
+            <a:off x="8077200" y="2011680"/>
+            <a:ext cx="2849880" cy="320040"/>
           </a:xfrm>
           <a:prstGeom prst="rect">
             <a:avLst/>
@@ -6279,7 +6279,7 @@
                 <a:ea typeface="Calibri" pitchFamily="34" charset="-122"/>
                 <a:cs typeface="Calibri" pitchFamily="34" charset="-120"/>
               </a:rPr>
-              <a:t>Outcomes tied to ROI</a:t>
+              <a:t>Spend avoided or reduced for the customer</a:t>
             </a:r>
             <a:endParaRPr lang="en-US" sz="1000" dirty="0"/>
           </a:p>
@@ -6293,8 +6293,8 @@
         </p:nvSpPr>
         <p:spPr>
           <a:xfrm>
-            <a:off x="8595360" y="2286000"/>
-            <a:ext cx="3108960" cy="365760"/>
+            <a:off x="8077200" y="2286000"/>
+            <a:ext cx="2849880" cy="365760"/>
           </a:xfrm>
           <a:prstGeom prst="rect">
             <a:avLst/>
@@ -6318,7 +6318,7 @@
                 <a:ea typeface="Calibri" pitchFamily="34" charset="-122"/>
                 <a:cs typeface="Calibri" pitchFamily="34" charset="-120"/>
               </a:rPr>
-              <a:t>Self-serve report requests deflected</a:t>
+              <a:t>Legacy BI licensing costs avoided</a:t>
             </a:r>
             <a:endParaRPr lang="en-US" sz="1200" dirty="0"/>
           </a:p>
@@ -6332,8 +6332,8 @@
         </p:nvSpPr>
         <p:spPr>
           <a:xfrm>
-            <a:off x="8595360" y="2606040"/>
-            <a:ext cx="3108960" cy="594360"/>
+            <a:off x="8077200" y="2606040"/>
+            <a:ext cx="2849880" cy="594360"/>
           </a:xfrm>
           <a:prstGeom prst="rect">
             <a:avLst/>
@@ -6357,7 +6357,7 @@
                 <a:ea typeface="Cambria" pitchFamily="34" charset="-122"/>
                 <a:cs typeface="Cambria" pitchFamily="34" charset="-120"/>
               </a:rPr>
-              <a:t>61</a:t>
+              <a:t>$50,000</a:t>
             </a:r>
             <a:endParaRPr lang="en-US" sz="3400" dirty="0"/>
           </a:p>
@@ -6371,8 +6371,8 @@
         </p:nvSpPr>
         <p:spPr>
           <a:xfrm>
-            <a:off x="8595360" y="3182112"/>
-            <a:ext cx="3108960" cy="274320"/>
+            <a:off x="8077200" y="3182112"/>
+            <a:ext cx="2849880" cy="274320"/>
           </a:xfrm>
           <a:prstGeom prst="rect">
             <a:avLst/>
@@ -6396,7 +6396,7 @@
                 <a:ea typeface="Calibri" pitchFamily="34" charset="-122"/>
                 <a:cs typeface="Calibri" pitchFamily="34" charset="-120"/>
               </a:rPr>
-              <a:t>of 75 % target</a:t>
+              <a:t>of $200,000 per year target</a:t>
             </a:r>
             <a:endParaRPr lang="en-US" sz="1050" dirty="0"/>
           </a:p>
@@ -6410,8 +6410,8 @@
         </p:nvSpPr>
         <p:spPr>
           <a:xfrm>
-            <a:off x="8595360" y="3547872"/>
-            <a:ext cx="3108960" cy="201168"/>
+            <a:off x="8077200" y="3547872"/>
+            <a:ext cx="2849880" cy="201168"/>
           </a:xfrm>
           <a:prstGeom prst="roundRect">
             <a:avLst>
@@ -6432,8 +6432,8 @@
         </p:nvSpPr>
         <p:spPr>
           <a:xfrm>
-            <a:off x="8595360" y="3547872"/>
-            <a:ext cx="2518258" cy="201168"/>
+            <a:off x="8077200" y="3547872"/>
+            <a:ext cx="712470" cy="201168"/>
           </a:xfrm>
           <a:prstGeom prst="roundRect">
             <a:avLst>
@@ -6441,7 +6441,7 @@
             </a:avLst>
           </a:prstGeom>
           <a:solidFill>
-            <a:srgbClr val="B7791F"/>
+            <a:srgbClr val="B4312F"/>
           </a:solidFill>
           <a:ln/>
         </p:spPr>
@@ -6454,8 +6454,8 @@
         </p:nvSpPr>
         <p:spPr>
           <a:xfrm>
-            <a:off x="8595360" y="3794760"/>
-            <a:ext cx="3108960" cy="274320"/>
+            <a:off x="8077200" y="3794760"/>
+            <a:ext cx="2849880" cy="274320"/>
           </a:xfrm>
           <a:prstGeom prst="rect">
             <a:avLst/>
@@ -6479,7 +6479,7 @@
                 <a:ea typeface="Calibri" pitchFamily="34" charset="-122"/>
                 <a:cs typeface="Calibri" pitchFamily="34" charset="-120"/>
               </a:rPr>
-              <a:t>81% of target</a:t>
+              <a:t>25% of target</a:t>
             </a:r>
             <a:endParaRPr lang="en-US" sz="950" dirty="0"/>
           </a:p>
@@ -6518,7 +6518,7 @@
                 <a:ea typeface="Calibri" pitchFamily="34" charset="-122"/>
                 <a:cs typeface="Calibri" pitchFamily="34" charset="-120"/>
               </a:rPr>
-              <a:t>Metric definitions follow TSIA guidance: adoption (active users / feature usage), onboarding (time-to-value, activation), and business impact (ROI, outcomes).</a:t>
+              <a:t>Metrics are tracked in the terms that matter to the customer: time saved, cost avoided, revenue enabled, or complexity removed from their operations.</a:t>
             </a:r>
             <a:endParaRPr lang="en-US" sz="1050" dirty="0"/>
           </a:p>
@@ -6667,7 +6667,7 @@
                 <a:ea typeface="Calibri" pitchFamily="34" charset="-122"/>
                 <a:cs typeface="Calibri" pitchFamily="34" charset="-120"/>
               </a:rPr>
-              <a:t>TSIA COMPONENT 5</a:t>
+              <a:t>SECTION 5</a:t>
             </a:r>
             <a:endParaRPr lang="en-US" sz="1200" dirty="0"/>
           </a:p>
@@ -7309,7 +7309,7 @@
                 <a:ea typeface="Calibri" pitchFamily="34" charset="-122"/>
                 <a:cs typeface="Calibri" pitchFamily="34" charset="-120"/>
               </a:rPr>
-              <a:t>TSIA COMPONENT 6</a:t>
+              <a:t>SECTION 6</a:t>
             </a:r>
             <a:endParaRPr lang="en-US" sz="1200" dirty="0"/>
           </a:p>
